--- a/docs/presentation.pptx
+++ b/docs/presentation.pptx
@@ -8176,7 +8176,7 @@
                 </a:solidFill>
                 <a:latin typeface="Calibri"/>
               </a:rPr>
-              <a:t>At 1.50 EUR a call and a 20.00 EUR deposit, break-even is 7.50% - below the 11.6982% base rate.</a:t>
+              <a:t>At 1.50 EUR a call and a 20.00 EUR deposit, break-even is 7.50% - below the 11.6982% rate of the modelling half.</a:t>
             </a:r>
           </a:p>
           <a:p>
@@ -8922,7 +8922,7 @@
                 </a:solidFill>
                 <a:latin typeface="Calibri"/>
               </a:rPr>
-              <a:t>45,211 clients in the file; 4,231 subscribed - 11.6982%, a 7.55 : 1 split.</a:t>
+              <a:t>45,211 clients in the file; 5,289 subscribed - 11.70%, a 7.55 : 1 split.</a:t>
             </a:r>
           </a:p>
           <a:p>
